--- a/gpt_stat/KAIST_2026_2027_수시지원자_비교.pptx
+++ b/gpt_stat/KAIST_2026_2027_수시지원자_비교.pptx
@@ -374,7 +374,7 @@
                   </a:pPr>
                 </a:p>
               </c:txPr>
-              <c:dLblPos val="t"/>
+              <c:dLblPos val="b"/>
               <c:showLegendKey val="0"/>
               <c:showVal val="1"/>
               <c:showCatName val="0"/>
@@ -715,6 +715,31 @@
               <c:showPercent val="0"/>
               <c:showBubbleSize val="0"/>
             </c:dLbl>
+            <c:dLbl>
+              <c:idx val="8"/>
+              <c:spPr/>
+              <c:txPr>
+                <a:bodyPr/>
+                <a:lstStyle/>
+                <a:p>
+                  <a:pPr>
+                    <a:defRPr sz="1700" b="1">
+                      <a:solidFill>
+                        <a:srgbClr val="005BAC"/>
+                      </a:solidFill>
+                      <a:latin typeface="맑은 고딕"/>
+                    </a:defRPr>
+                  </a:pPr>
+                </a:p>
+              </c:txPr>
+              <c:dLblPos val="t"/>
+              <c:showLegendKey val="0"/>
+              <c:showVal val="1"/>
+              <c:showCatName val="0"/>
+              <c:showSerName val="0"/>
+              <c:showPercent val="0"/>
+              <c:showBubbleSize val="0"/>
+            </c:dLbl>
             <c:numFmt formatCode="#,##0" sourceLinked="0"/>
             <c:txPr>
               <a:bodyPr/>
@@ -803,6 +828,9 @@
                 </c:pt>
                 <c:pt idx="7">
                   <c:v>1682</c:v>
+                </c:pt>
+                <c:pt idx="8">
+                  <c:v>2724</c:v>
                 </c:pt>
               </c:numCache>
             </c:numRef>
@@ -866,7 +894,7 @@
       <c:valAx>
         <c:axId val="2140495176"/>
         <c:scaling>
-          <c:max val="2500.0"/>
+          <c:max val="3500.0"/>
           <c:min val="-500.0"/>
         </c:scaling>
         <c:delete val="0"/>
@@ -1211,7 +1239,7 @@
                   </a:pPr>
                 </a:p>
               </c:txPr>
-              <c:dLblPos val="t"/>
+              <c:dLblPos val="b"/>
               <c:showLegendKey val="0"/>
               <c:showVal val="1"/>
               <c:showCatName val="0"/>
@@ -1552,6 +1580,31 @@
               <c:showPercent val="0"/>
               <c:showBubbleSize val="0"/>
             </c:dLbl>
+            <c:dLbl>
+              <c:idx val="8"/>
+              <c:spPr/>
+              <c:txPr>
+                <a:bodyPr/>
+                <a:lstStyle/>
+                <a:p>
+                  <a:pPr>
+                    <a:defRPr sz="1700" b="1">
+                      <a:solidFill>
+                        <a:srgbClr val="005BAC"/>
+                      </a:solidFill>
+                      <a:latin typeface="맑은 고딕"/>
+                    </a:defRPr>
+                  </a:pPr>
+                </a:p>
+              </c:txPr>
+              <c:dLblPos val="t"/>
+              <c:showLegendKey val="0"/>
+              <c:showVal val="1"/>
+              <c:showCatName val="0"/>
+              <c:showSerName val="0"/>
+              <c:showPercent val="0"/>
+              <c:showBubbleSize val="0"/>
+            </c:dLbl>
             <c:numFmt formatCode="#,##0" sourceLinked="0"/>
             <c:txPr>
               <a:bodyPr/>
@@ -1640,6 +1693,9 @@
                 </c:pt>
                 <c:pt idx="7">
                   <c:v>402</c:v>
+                </c:pt>
+                <c:pt idx="8">
+                  <c:v>1514</c:v>
                 </c:pt>
               </c:numCache>
             </c:numRef>
@@ -1703,7 +1759,7 @@
       <c:valAx>
         <c:axId val="2140495176"/>
         <c:scaling>
-          <c:max val="2000.0"/>
+          <c:max val="2500.0"/>
           <c:min val="-500.0"/>
         </c:scaling>
         <c:delete val="0"/>
@@ -2048,7 +2104,7 @@
                   </a:pPr>
                 </a:p>
               </c:txPr>
-              <c:dLblPos val="t"/>
+              <c:dLblPos val="b"/>
               <c:showLegendKey val="0"/>
               <c:showVal val="1"/>
               <c:showCatName val="0"/>
@@ -2389,6 +2445,31 @@
               <c:showPercent val="0"/>
               <c:showBubbleSize val="0"/>
             </c:dLbl>
+            <c:dLbl>
+              <c:idx val="8"/>
+              <c:spPr/>
+              <c:txPr>
+                <a:bodyPr/>
+                <a:lstStyle/>
+                <a:p>
+                  <a:pPr>
+                    <a:defRPr sz="1700" b="1">
+                      <a:solidFill>
+                        <a:srgbClr val="005BAC"/>
+                      </a:solidFill>
+                      <a:latin typeface="맑은 고딕"/>
+                    </a:defRPr>
+                  </a:pPr>
+                </a:p>
+              </c:txPr>
+              <c:dLblPos val="t"/>
+              <c:showLegendKey val="0"/>
+              <c:showVal val="1"/>
+              <c:showCatName val="0"/>
+              <c:showSerName val="0"/>
+              <c:showPercent val="0"/>
+              <c:showBubbleSize val="0"/>
+            </c:dLbl>
             <c:numFmt formatCode="#,##0" sourceLinked="0"/>
             <c:txPr>
               <a:bodyPr/>
@@ -2477,6 +2558,9 @@
                 </c:pt>
                 <c:pt idx="7">
                   <c:v>1870</c:v>
+                </c:pt>
+                <c:pt idx="8">
+                  <c:v>3204</c:v>
                 </c:pt>
               </c:numCache>
             </c:numRef>
@@ -2540,8 +2624,8 @@
       <c:valAx>
         <c:axId val="2140495176"/>
         <c:scaling>
-          <c:max val="3500.0"/>
-          <c:min val="-500.0"/>
+          <c:max val="5000.0"/>
+          <c:min val="-1000.0"/>
         </c:scaling>
         <c:delete val="0"/>
         <c:axPos val="l"/>
@@ -2584,7 +2668,7 @@
         </c:txPr>
         <c:crossAx val="2118791784"/>
         <c:crosses val="autoZero"/>
-        <c:majorUnit val="500.0"/>
+        <c:majorUnit val="1000.0"/>
       </c:valAx>
     </c:plotArea>
     <c:legend>
@@ -2885,7 +2969,7 @@
                   </a:pPr>
                 </a:p>
               </c:txPr>
-              <c:dLblPos val="t"/>
+              <c:dLblPos val="b"/>
               <c:showLegendKey val="0"/>
               <c:showVal val="1"/>
               <c:showCatName val="0"/>
@@ -3226,6 +3310,31 @@
               <c:showPercent val="0"/>
               <c:showBubbleSize val="0"/>
             </c:dLbl>
+            <c:dLbl>
+              <c:idx val="8"/>
+              <c:spPr/>
+              <c:txPr>
+                <a:bodyPr/>
+                <a:lstStyle/>
+                <a:p>
+                  <a:pPr>
+                    <a:defRPr sz="1700" b="1">
+                      <a:solidFill>
+                        <a:srgbClr val="005BAC"/>
+                      </a:solidFill>
+                      <a:latin typeface="맑은 고딕"/>
+                    </a:defRPr>
+                  </a:pPr>
+                </a:p>
+              </c:txPr>
+              <c:dLblPos val="t"/>
+              <c:showLegendKey val="0"/>
+              <c:showVal val="1"/>
+              <c:showCatName val="0"/>
+              <c:showSerName val="0"/>
+              <c:showPercent val="0"/>
+              <c:showBubbleSize val="0"/>
+            </c:dLbl>
             <c:numFmt formatCode="#,##0" sourceLinked="0"/>
             <c:txPr>
               <a:bodyPr/>
@@ -3314,6 +3423,9 @@
                 </c:pt>
                 <c:pt idx="7">
                   <c:v>258</c:v>
+                </c:pt>
+                <c:pt idx="8">
+                  <c:v>480</c:v>
                 </c:pt>
               </c:numCache>
             </c:numRef>
@@ -3722,7 +3834,7 @@
                   </a:pPr>
                 </a:p>
               </c:txPr>
-              <c:dLblPos val="t"/>
+              <c:dLblPos val="b"/>
               <c:showLegendKey val="0"/>
               <c:showVal val="1"/>
               <c:showCatName val="0"/>
@@ -4063,6 +4175,31 @@
               <c:showPercent val="0"/>
               <c:showBubbleSize val="0"/>
             </c:dLbl>
+            <c:dLbl>
+              <c:idx val="8"/>
+              <c:spPr/>
+              <c:txPr>
+                <a:bodyPr/>
+                <a:lstStyle/>
+                <a:p>
+                  <a:pPr>
+                    <a:defRPr sz="1700" b="1">
+                      <a:solidFill>
+                        <a:srgbClr val="005BAC"/>
+                      </a:solidFill>
+                      <a:latin typeface="맑은 고딕"/>
+                    </a:defRPr>
+                  </a:pPr>
+                </a:p>
+              </c:txPr>
+              <c:dLblPos val="t"/>
+              <c:showLegendKey val="0"/>
+              <c:showVal val="1"/>
+              <c:showCatName val="0"/>
+              <c:showSerName val="0"/>
+              <c:showPercent val="0"/>
+              <c:showBubbleSize val="0"/>
+            </c:dLbl>
             <c:numFmt formatCode="#,##0" sourceLinked="0"/>
             <c:txPr>
               <a:bodyPr/>
@@ -4151,6 +4288,9 @@
                 </c:pt>
                 <c:pt idx="7">
                   <c:v>132</c:v>
+                </c:pt>
+                <c:pt idx="8">
+                  <c:v>287</c:v>
                 </c:pt>
               </c:numCache>
             </c:numRef>
@@ -4214,7 +4354,7 @@
       <c:valAx>
         <c:axId val="2140495176"/>
         <c:scaling>
-          <c:max val="300.0"/>
+          <c:max val="350.0"/>
           <c:min val="-50.0"/>
         </c:scaling>
         <c:delete val="0"/>
@@ -4900,6 +5040,31 @@
               <c:showPercent val="0"/>
               <c:showBubbleSize val="0"/>
             </c:dLbl>
+            <c:dLbl>
+              <c:idx val="8"/>
+              <c:spPr/>
+              <c:txPr>
+                <a:bodyPr/>
+                <a:lstStyle/>
+                <a:p>
+                  <a:pPr>
+                    <a:defRPr sz="1700" b="1">
+                      <a:solidFill>
+                        <a:srgbClr val="005BAC"/>
+                      </a:solidFill>
+                      <a:latin typeface="맑은 고딕"/>
+                    </a:defRPr>
+                  </a:pPr>
+                </a:p>
+              </c:txPr>
+              <c:dLblPos val="b"/>
+              <c:showLegendKey val="0"/>
+              <c:showVal val="1"/>
+              <c:showCatName val="0"/>
+              <c:showSerName val="0"/>
+              <c:showPercent val="0"/>
+              <c:showBubbleSize val="0"/>
+            </c:dLbl>
             <c:numFmt formatCode="#,##0" sourceLinked="0"/>
             <c:txPr>
               <a:bodyPr/>
@@ -4988,6 +5153,9 @@
                 </c:pt>
                 <c:pt idx="7">
                   <c:v>72</c:v>
+                </c:pt>
+                <c:pt idx="8">
+                  <c:v>185</c:v>
                 </c:pt>
               </c:numCache>
             </c:numRef>
@@ -8178,7 +8346,7 @@
                 </a:solidFill>
                 <a:latin typeface="맑은 고딕"/>
               </a:rPr>
-              <a:t>2026학년도 모집 200명 · 최종 1,889명 · 9.45:1     |     2027학년도 모집 270명 · 현재 1,682명 · 6.23:1</a:t>
+              <a:t>2026학년도 모집 200명 · 최종 1,889명 · 9.45:1     |     2027학년도 모집 270명 · 현재 2,724명 · 10.09:1</a:t>
             </a:r>
           </a:p>
         </p:txBody>
@@ -8282,7 +8450,7 @@
                 </a:solidFill>
                 <a:latin typeface="맑은 고딕"/>
               </a:rPr>
-              <a:t>2026학년도 모집 85명 · 최종 1,313명 · 15.45:1     |     2027학년도 모집 85명 · 현재 402명 · 4.73:1</a:t>
+              <a:t>2026학년도 모집 85명 · 최종 1,313명 · 15.45:1     |     2027학년도 모집 85명 · 현재 1,514명 · 17.81:1</a:t>
             </a:r>
           </a:p>
         </p:txBody>
@@ -8386,7 +8554,7 @@
                 </a:solidFill>
                 <a:latin typeface="맑은 고딕"/>
               </a:rPr>
-              <a:t>2026학년도 모집 350명 · 최종 2,675명 · 7.64:1     |     2027학년도 모집 380명 · 현재 1,870명 · 4.92:1</a:t>
+              <a:t>2026학년도 모집 350명 · 최종 2,675명 · 7.64:1     |     2027학년도 모집 380명 · 현재 3,204명 · 8.43:1</a:t>
             </a:r>
           </a:p>
         </p:txBody>
@@ -8490,7 +8658,7 @@
                 </a:solidFill>
                 <a:latin typeface="맑은 고딕"/>
               </a:rPr>
-              <a:t>2026학년도 모집 60명 · 최종 457명 · 7.62:1     |     2027학년도 모집 60명 · 현재 258명 · 4.30:1</a:t>
+              <a:t>2026학년도 모집 60명 · 최종 457명 · 7.62:1     |     2027학년도 모집 60명 · 현재 480명 · 8.00:1</a:t>
             </a:r>
           </a:p>
         </p:txBody>
@@ -8594,7 +8762,7 @@
                 </a:solidFill>
                 <a:latin typeface="맑은 고딕"/>
               </a:rPr>
-              <a:t>2026학년도 모집 30명 · 최종 237명 · 7.90:1     |     2027학년도 모집 30명 · 현재 132명 · 4.40:1</a:t>
+              <a:t>2026학년도 모집 30명 · 최종 237명 · 7.90:1     |     2027학년도 모집 30명 · 현재 287명 · 9.57:1</a:t>
             </a:r>
           </a:p>
         </p:txBody>
@@ -8698,7 +8866,7 @@
                 </a:solidFill>
                 <a:latin typeface="맑은 고딕"/>
               </a:rPr>
-              <a:t>2026학년도 모집 100명 · 최종 420명 · 4.20:1     |     2027학년도 모집 40명 · 현재 72명 · 1.80:1</a:t>
+              <a:t>2026학년도 모집 100명 · 최종 420명 · 4.20:1     |     2027학년도 모집 40명 · 현재 185명 · 4.62:1</a:t>
             </a:r>
           </a:p>
         </p:txBody>
